--- a/ppt/MH_Grade10/MH10_S64_Lenses.pptx
+++ b/ppt/MH_Grade10/MH10_S64_Lenses.pptx
@@ -15811,7 +15811,7 @@
         </p:nvSpPr>
         <p:spPr>
           <a:xfrm>
-            <a:off x="640080" y="1828800"/>
+            <a:off x="640080" y="1874519"/>
             <a:ext cx="10881360" cy="4114800"/>
           </a:xfrm>
           <a:prstGeom prst="roundRect">
@@ -15857,165 +15857,422 @@
       </p:sp>
       <p:sp>
         <p:nvSpPr>
-          <p:cNvPr id="7" name="TextBox 6"/>
+          <p:cNvPr id="7" name="Rounded Rectangle 6"/>
+          <p:cNvSpPr/>
+          <p:nvPr/>
+        </p:nvSpPr>
+        <p:spPr>
+          <a:xfrm>
+            <a:off x="1051560" y="2381097"/>
+            <a:ext cx="100584" cy="545668"/>
+          </a:xfrm>
+          <a:prstGeom prst="roundRect">
+            <a:avLst>
+              <a:gd name="adj" fmla="val 50000"/>
+            </a:avLst>
+          </a:prstGeom>
+          <a:solidFill>
+            <a:srgbClr val="0A9396"/>
+          </a:solidFill>
+          <a:ln>
+            <a:noFill/>
+          </a:ln>
+          <a:effectLst/>
+        </p:spPr>
+        <p:style>
+          <a:lnRef idx="1">
+            <a:schemeClr val="accent1"/>
+          </a:lnRef>
+          <a:fillRef idx="3">
+            <a:schemeClr val="accent1"/>
+          </a:fillRef>
+          <a:effectRef idx="2">
+            <a:schemeClr val="accent1"/>
+          </a:effectRef>
+          <a:fontRef idx="minor">
+            <a:schemeClr val="lt1"/>
+          </a:fontRef>
+        </p:style>
+        <p:txBody>
+          <a:bodyPr rtlCol="0" anchor="ctr"/>
+          <a:lstStyle/>
+          <a:p>
+            <a:pPr algn="ctr"/>
+          </a:p>
+        </p:txBody>
+      </p:sp>
+      <p:sp>
+        <p:nvSpPr>
+          <p:cNvPr id="8" name="TextBox 7"/>
           <p:cNvSpPr txBox="1"/>
           <p:nvPr/>
         </p:nvSpPr>
         <p:spPr>
           <a:xfrm>
-            <a:off x="1005840" y="2103120"/>
-            <a:ext cx="10058400" cy="3657600"/>
-          </a:xfrm>
-          <a:prstGeom prst="rect">
-            <a:avLst/>
-          </a:prstGeom>
-          <a:noFill/>
-        </p:spPr>
-        <p:txBody>
-          <a:bodyPr wrap="square" anchor="t" lIns="0" rIns="0" tIns="0" bIns="0">
+            <a:off x="1371600" y="2240279"/>
+            <a:ext cx="9784080" cy="880109"/>
+          </a:xfrm>
+          <a:prstGeom prst="rect">
+            <a:avLst/>
+          </a:prstGeom>
+          <a:noFill/>
+        </p:spPr>
+        <p:txBody>
+          <a:bodyPr wrap="square" anchor="ctr" lIns="0" rIns="0" tIns="0" bIns="0">
             <a:spAutoFit/>
           </a:bodyPr>
           <a:lstStyle/>
           <a:p>
             <a:pPr algn="l">
               <a:lnSpc>
-                <a:spcPct val="105000"/>
+                <a:spcPct val="102000"/>
               </a:lnSpc>
               <a:spcAft>
-                <a:spcPts val="1100"/>
+                <a:spcPts val="300"/>
               </a:spcAft>
             </a:pPr>
             <a:r>
-              <a:rPr sz="1600" b="1" i="0">
-                <a:solidFill>
-                  <a:srgbClr val="2563EB"/>
-                </a:solidFill>
-                <a:latin typeface="Calibri"/>
-              </a:rPr>
-              <a:t>•  </a:t>
-            </a:r>
-            <a:r>
-              <a:rPr sz="1600" b="1" i="0">
+              <a:rPr sz="1700" b="1" i="0">
                 <a:solidFill>
                   <a:srgbClr val="1D2433"/>
                 </a:solidFill>
                 <a:latin typeface="Calibri"/>
               </a:rPr>
-              <a:t>Eye lens and cornea  </a:t>
-            </a:r>
-            <a:r>
-              <a:rPr sz="1500" b="0" i="0">
-                <a:solidFill>
-                  <a:srgbClr val="6B7280"/>
-                </a:solidFill>
-                <a:latin typeface="Calibri"/>
-              </a:rPr>
-              <a:t>Light enters through the cornea and the convex eye lens, which together form a real, inverted image on the retina.</a:t>
+              <a:t>Eye lens and cornea</a:t>
             </a:r>
           </a:p>
           <a:p>
             <a:pPr algn="l">
               <a:lnSpc>
-                <a:spcPct val="105000"/>
+                <a:spcPct val="102000"/>
               </a:lnSpc>
               <a:spcAft>
-                <a:spcPts val="1100"/>
+                <a:spcPts val="300"/>
               </a:spcAft>
             </a:pPr>
             <a:r>
-              <a:rPr sz="1600" b="1" i="0">
-                <a:solidFill>
-                  <a:srgbClr val="2563EB"/>
-                </a:solidFill>
-                <a:latin typeface="Calibri"/>
-              </a:rPr>
-              <a:t>•  </a:t>
-            </a:r>
-            <a:r>
-              <a:rPr sz="1600" b="1" i="0">
-                <a:solidFill>
-                  <a:srgbClr val="1D2433"/>
-                </a:solidFill>
-                <a:latin typeface="Calibri"/>
-              </a:rPr>
-              <a:t>Accommodation  </a:t>
-            </a:r>
-            <a:r>
-              <a:rPr sz="1500" b="0" i="0">
+              <a:rPr sz="1350" b="0" i="0">
                 <a:solidFill>
                   <a:srgbClr val="6B7280"/>
                 </a:solidFill>
                 <a:latin typeface="Calibri"/>
               </a:rPr>
-              <a:t>The ciliary muscles change the focal length of the eye lens — thinner for distant objects, thicker for near ones — so objects at different distances stay in focus.</a:t>
-            </a:r>
-          </a:p>
+              <a:t>Light enters through the cornea and the convex eye lens, which together form a real, inverted image on the retina.</a:t>
+            </a:r>
+          </a:p>
+        </p:txBody>
+      </p:sp>
+      <p:sp>
+        <p:nvSpPr>
+          <p:cNvPr id="9" name="Rounded Rectangle 8"/>
+          <p:cNvSpPr/>
+          <p:nvPr/>
+        </p:nvSpPr>
+        <p:spPr>
+          <a:xfrm>
+            <a:off x="1051560" y="3261207"/>
+            <a:ext cx="100584" cy="545668"/>
+          </a:xfrm>
+          <a:prstGeom prst="roundRect">
+            <a:avLst>
+              <a:gd name="adj" fmla="val 50000"/>
+            </a:avLst>
+          </a:prstGeom>
+          <a:solidFill>
+            <a:srgbClr val="F4801A"/>
+          </a:solidFill>
+          <a:ln>
+            <a:noFill/>
+          </a:ln>
+          <a:effectLst/>
+        </p:spPr>
+        <p:style>
+          <a:lnRef idx="1">
+            <a:schemeClr val="accent1"/>
+          </a:lnRef>
+          <a:fillRef idx="3">
+            <a:schemeClr val="accent1"/>
+          </a:fillRef>
+          <a:effectRef idx="2">
+            <a:schemeClr val="accent1"/>
+          </a:effectRef>
+          <a:fontRef idx="minor">
+            <a:schemeClr val="lt1"/>
+          </a:fontRef>
+        </p:style>
+        <p:txBody>
+          <a:bodyPr rtlCol="0" anchor="ctr"/>
+          <a:lstStyle/>
+          <a:p>
+            <a:pPr algn="ctr"/>
+          </a:p>
+        </p:txBody>
+      </p:sp>
+      <p:sp>
+        <p:nvSpPr>
+          <p:cNvPr id="10" name="TextBox 9"/>
+          <p:cNvSpPr txBox="1"/>
+          <p:nvPr/>
+        </p:nvSpPr>
+        <p:spPr>
+          <a:xfrm>
+            <a:off x="1371600" y="3120389"/>
+            <a:ext cx="9784080" cy="880109"/>
+          </a:xfrm>
+          <a:prstGeom prst="rect">
+            <a:avLst/>
+          </a:prstGeom>
+          <a:noFill/>
+        </p:spPr>
+        <p:txBody>
+          <a:bodyPr wrap="square" anchor="ctr" lIns="0" rIns="0" tIns="0" bIns="0">
+            <a:spAutoFit/>
+          </a:bodyPr>
+          <a:lstStyle/>
           <a:p>
             <a:pPr algn="l">
               <a:lnSpc>
-                <a:spcPct val="105000"/>
+                <a:spcPct val="102000"/>
               </a:lnSpc>
               <a:spcAft>
-                <a:spcPts val="1100"/>
+                <a:spcPts val="300"/>
               </a:spcAft>
             </a:pPr>
             <a:r>
-              <a:rPr sz="1600" b="1" i="0">
-                <a:solidFill>
-                  <a:srgbClr val="2563EB"/>
-                </a:solidFill>
-                <a:latin typeface="Calibri"/>
-              </a:rPr>
-              <a:t>•  </a:t>
-            </a:r>
-            <a:r>
-              <a:rPr sz="1600" b="1" i="0">
+              <a:rPr sz="1700" b="1" i="0">
                 <a:solidFill>
                   <a:srgbClr val="1D2433"/>
                 </a:solidFill>
                 <a:latin typeface="Calibri"/>
               </a:rPr>
-              <a:t>Least distance of distinct vision  </a:t>
-            </a:r>
-            <a:r>
-              <a:rPr sz="1500" b="0" i="0">
-                <a:solidFill>
-                  <a:srgbClr val="6B7280"/>
-                </a:solidFill>
-                <a:latin typeface="Calibri"/>
-              </a:rPr>
-              <a:t>The closest distance at which a normal eye can see an object clearly and without strain is about 25 cm (the near point).</a:t>
+              <a:t>Accommodation</a:t>
             </a:r>
           </a:p>
           <a:p>
             <a:pPr algn="l">
               <a:lnSpc>
-                <a:spcPct val="105000"/>
+                <a:spcPct val="102000"/>
               </a:lnSpc>
               <a:spcAft>
-                <a:spcPts val="1100"/>
+                <a:spcPts val="300"/>
               </a:spcAft>
             </a:pPr>
             <a:r>
-              <a:rPr sz="1600" b="1" i="0">
-                <a:solidFill>
-                  <a:srgbClr val="2563EB"/>
-                </a:solidFill>
-                <a:latin typeface="Calibri"/>
-              </a:rPr>
-              <a:t>•  </a:t>
-            </a:r>
-            <a:r>
-              <a:rPr sz="1600" b="1" i="0">
+              <a:rPr sz="1350" b="0" i="0">
+                <a:solidFill>
+                  <a:srgbClr val="6B7280"/>
+                </a:solidFill>
+                <a:latin typeface="Calibri"/>
+              </a:rPr>
+              <a:t>The ciliary muscles change the focal length of the eye lens — thinner for distant objects, thicker for near ones — so objects at different distances stay in focus.</a:t>
+            </a:r>
+          </a:p>
+        </p:txBody>
+      </p:sp>
+      <p:sp>
+        <p:nvSpPr>
+          <p:cNvPr id="11" name="Rounded Rectangle 10"/>
+          <p:cNvSpPr/>
+          <p:nvPr/>
+        </p:nvSpPr>
+        <p:spPr>
+          <a:xfrm>
+            <a:off x="1051560" y="4141317"/>
+            <a:ext cx="100584" cy="545668"/>
+          </a:xfrm>
+          <a:prstGeom prst="roundRect">
+            <a:avLst>
+              <a:gd name="adj" fmla="val 50000"/>
+            </a:avLst>
+          </a:prstGeom>
+          <a:solidFill>
+            <a:srgbClr val="6A4C93"/>
+          </a:solidFill>
+          <a:ln>
+            <a:noFill/>
+          </a:ln>
+          <a:effectLst/>
+        </p:spPr>
+        <p:style>
+          <a:lnRef idx="1">
+            <a:schemeClr val="accent1"/>
+          </a:lnRef>
+          <a:fillRef idx="3">
+            <a:schemeClr val="accent1"/>
+          </a:fillRef>
+          <a:effectRef idx="2">
+            <a:schemeClr val="accent1"/>
+          </a:effectRef>
+          <a:fontRef idx="minor">
+            <a:schemeClr val="lt1"/>
+          </a:fontRef>
+        </p:style>
+        <p:txBody>
+          <a:bodyPr rtlCol="0" anchor="ctr"/>
+          <a:lstStyle/>
+          <a:p>
+            <a:pPr algn="ctr"/>
+          </a:p>
+        </p:txBody>
+      </p:sp>
+      <p:sp>
+        <p:nvSpPr>
+          <p:cNvPr id="12" name="TextBox 11"/>
+          <p:cNvSpPr txBox="1"/>
+          <p:nvPr/>
+        </p:nvSpPr>
+        <p:spPr>
+          <a:xfrm>
+            <a:off x="1371600" y="4000500"/>
+            <a:ext cx="9784080" cy="880109"/>
+          </a:xfrm>
+          <a:prstGeom prst="rect">
+            <a:avLst/>
+          </a:prstGeom>
+          <a:noFill/>
+        </p:spPr>
+        <p:txBody>
+          <a:bodyPr wrap="square" anchor="ctr" lIns="0" rIns="0" tIns="0" bIns="0">
+            <a:spAutoFit/>
+          </a:bodyPr>
+          <a:lstStyle/>
+          <a:p>
+            <a:pPr algn="l">
+              <a:lnSpc>
+                <a:spcPct val="102000"/>
+              </a:lnSpc>
+              <a:spcAft>
+                <a:spcPts val="300"/>
+              </a:spcAft>
+            </a:pPr>
+            <a:r>
+              <a:rPr sz="1700" b="1" i="0">
                 <a:solidFill>
                   <a:srgbClr val="1D2433"/>
                 </a:solidFill>
                 <a:latin typeface="Calibri"/>
               </a:rPr>
-              <a:t>Persistence of vision  </a:t>
-            </a:r>
-            <a:r>
-              <a:rPr sz="1500" b="0" i="0">
+              <a:t>Least distance of distinct vision</a:t>
+            </a:r>
+          </a:p>
+          <a:p>
+            <a:pPr algn="l">
+              <a:lnSpc>
+                <a:spcPct val="102000"/>
+              </a:lnSpc>
+              <a:spcAft>
+                <a:spcPts val="300"/>
+              </a:spcAft>
+            </a:pPr>
+            <a:r>
+              <a:rPr sz="1350" b="0" i="0">
+                <a:solidFill>
+                  <a:srgbClr val="6B7280"/>
+                </a:solidFill>
+                <a:latin typeface="Calibri"/>
+              </a:rPr>
+              <a:t>The closest distance at which a normal eye can see an object clearly and without strain is about 25 cm (the near point).</a:t>
+            </a:r>
+          </a:p>
+        </p:txBody>
+      </p:sp>
+      <p:sp>
+        <p:nvSpPr>
+          <p:cNvPr id="13" name="Rounded Rectangle 12"/>
+          <p:cNvSpPr/>
+          <p:nvPr/>
+        </p:nvSpPr>
+        <p:spPr>
+          <a:xfrm>
+            <a:off x="1051560" y="5021427"/>
+            <a:ext cx="100584" cy="545668"/>
+          </a:xfrm>
+          <a:prstGeom prst="roundRect">
+            <a:avLst>
+              <a:gd name="adj" fmla="val 50000"/>
+            </a:avLst>
+          </a:prstGeom>
+          <a:solidFill>
+            <a:srgbClr val="E63946"/>
+          </a:solidFill>
+          <a:ln>
+            <a:noFill/>
+          </a:ln>
+          <a:effectLst/>
+        </p:spPr>
+        <p:style>
+          <a:lnRef idx="1">
+            <a:schemeClr val="accent1"/>
+          </a:lnRef>
+          <a:fillRef idx="3">
+            <a:schemeClr val="accent1"/>
+          </a:fillRef>
+          <a:effectRef idx="2">
+            <a:schemeClr val="accent1"/>
+          </a:effectRef>
+          <a:fontRef idx="minor">
+            <a:schemeClr val="lt1"/>
+          </a:fontRef>
+        </p:style>
+        <p:txBody>
+          <a:bodyPr rtlCol="0" anchor="ctr"/>
+          <a:lstStyle/>
+          <a:p>
+            <a:pPr algn="ctr"/>
+          </a:p>
+        </p:txBody>
+      </p:sp>
+      <p:sp>
+        <p:nvSpPr>
+          <p:cNvPr id="14" name="TextBox 13"/>
+          <p:cNvSpPr txBox="1"/>
+          <p:nvPr/>
+        </p:nvSpPr>
+        <p:spPr>
+          <a:xfrm>
+            <a:off x="1371600" y="4880609"/>
+            <a:ext cx="9784080" cy="880109"/>
+          </a:xfrm>
+          <a:prstGeom prst="rect">
+            <a:avLst/>
+          </a:prstGeom>
+          <a:noFill/>
+        </p:spPr>
+        <p:txBody>
+          <a:bodyPr wrap="square" anchor="ctr" lIns="0" rIns="0" tIns="0" bIns="0">
+            <a:spAutoFit/>
+          </a:bodyPr>
+          <a:lstStyle/>
+          <a:p>
+            <a:pPr algn="l">
+              <a:lnSpc>
+                <a:spcPct val="102000"/>
+              </a:lnSpc>
+              <a:spcAft>
+                <a:spcPts val="300"/>
+              </a:spcAft>
+            </a:pPr>
+            <a:r>
+              <a:rPr sz="1700" b="1" i="0">
+                <a:solidFill>
+                  <a:srgbClr val="1D2433"/>
+                </a:solidFill>
+                <a:latin typeface="Calibri"/>
+              </a:rPr>
+              <a:t>Persistence of vision</a:t>
+            </a:r>
+          </a:p>
+          <a:p>
+            <a:pPr algn="l">
+              <a:lnSpc>
+                <a:spcPct val="102000"/>
+              </a:lnSpc>
+              <a:spcAft>
+                <a:spcPts val="300"/>
+              </a:spcAft>
+            </a:pPr>
+            <a:r>
+              <a:rPr sz="1350" b="0" i="0">
                 <a:solidFill>
                   <a:srgbClr val="6B7280"/>
                 </a:solidFill>
@@ -26588,7 +26845,7 @@
         </p:nvSpPr>
         <p:spPr>
           <a:xfrm>
-            <a:off x="640080" y="1828800"/>
+            <a:off x="640080" y="1874519"/>
             <a:ext cx="10881360" cy="4114800"/>
           </a:xfrm>
           <a:prstGeom prst="roundRect">
@@ -26634,239 +26891,636 @@
       </p:sp>
       <p:sp>
         <p:nvSpPr>
-          <p:cNvPr id="7" name="TextBox 6"/>
+          <p:cNvPr id="7" name="Rounded Rectangle 6"/>
+          <p:cNvSpPr/>
+          <p:nvPr/>
+        </p:nvSpPr>
+        <p:spPr>
+          <a:xfrm>
+            <a:off x="1051560" y="2334158"/>
+            <a:ext cx="100584" cy="363778"/>
+          </a:xfrm>
+          <a:prstGeom prst="roundRect">
+            <a:avLst>
+              <a:gd name="adj" fmla="val 50000"/>
+            </a:avLst>
+          </a:prstGeom>
+          <a:solidFill>
+            <a:srgbClr val="0A9396"/>
+          </a:solidFill>
+          <a:ln>
+            <a:noFill/>
+          </a:ln>
+          <a:effectLst/>
+        </p:spPr>
+        <p:style>
+          <a:lnRef idx="1">
+            <a:schemeClr val="accent1"/>
+          </a:lnRef>
+          <a:fillRef idx="3">
+            <a:schemeClr val="accent1"/>
+          </a:fillRef>
+          <a:effectRef idx="2">
+            <a:schemeClr val="accent1"/>
+          </a:effectRef>
+          <a:fontRef idx="minor">
+            <a:schemeClr val="lt1"/>
+          </a:fontRef>
+        </p:style>
+        <p:txBody>
+          <a:bodyPr rtlCol="0" anchor="ctr"/>
+          <a:lstStyle/>
+          <a:p>
+            <a:pPr algn="ctr"/>
+          </a:p>
+        </p:txBody>
+      </p:sp>
+      <p:sp>
+        <p:nvSpPr>
+          <p:cNvPr id="8" name="TextBox 7"/>
           <p:cNvSpPr txBox="1"/>
           <p:nvPr/>
         </p:nvSpPr>
         <p:spPr>
           <a:xfrm>
-            <a:off x="1005840" y="2103120"/>
-            <a:ext cx="10058400" cy="3657600"/>
-          </a:xfrm>
-          <a:prstGeom prst="rect">
-            <a:avLst/>
-          </a:prstGeom>
-          <a:noFill/>
-        </p:spPr>
-        <p:txBody>
-          <a:bodyPr wrap="square" anchor="t" lIns="0" rIns="0" tIns="0" bIns="0">
+            <a:off x="1371600" y="2240279"/>
+            <a:ext cx="9784080" cy="586740"/>
+          </a:xfrm>
+          <a:prstGeom prst="rect">
+            <a:avLst/>
+          </a:prstGeom>
+          <a:noFill/>
+        </p:spPr>
+        <p:txBody>
+          <a:bodyPr wrap="square" anchor="ctr" lIns="0" rIns="0" tIns="0" bIns="0">
             <a:spAutoFit/>
           </a:bodyPr>
           <a:lstStyle/>
           <a:p>
             <a:pPr algn="l">
               <a:lnSpc>
-                <a:spcPct val="105000"/>
+                <a:spcPct val="102000"/>
               </a:lnSpc>
               <a:spcAft>
-                <a:spcPts val="1100"/>
+                <a:spcPts val="300"/>
               </a:spcAft>
             </a:pPr>
             <a:r>
-              <a:rPr sz="1600" b="1" i="0">
-                <a:solidFill>
-                  <a:srgbClr val="2563EB"/>
-                </a:solidFill>
-                <a:latin typeface="Calibri"/>
-              </a:rPr>
-              <a:t>•  </a:t>
-            </a:r>
-            <a:r>
-              <a:rPr sz="1600" b="1" i="0">
+              <a:rPr sz="1700" b="1" i="0">
                 <a:solidFill>
                   <a:srgbClr val="1D2433"/>
                 </a:solidFill>
                 <a:latin typeface="Calibri"/>
               </a:rPr>
-              <a:t>Centres of curvature (C₁, C₂)  </a:t>
-            </a:r>
-            <a:r>
-              <a:rPr sz="1500" b="0" i="0">
-                <a:solidFill>
-                  <a:srgbClr val="6B7280"/>
-                </a:solidFill>
-                <a:latin typeface="Calibri"/>
-              </a:rPr>
-              <a:t>The centres of the two spheres whose surfaces form the two faces of the lens.</a:t>
+              <a:t>Centres of curvature (C₁, C₂)</a:t>
             </a:r>
           </a:p>
           <a:p>
             <a:pPr algn="l">
               <a:lnSpc>
-                <a:spcPct val="105000"/>
+                <a:spcPct val="102000"/>
               </a:lnSpc>
               <a:spcAft>
-                <a:spcPts val="1100"/>
+                <a:spcPts val="300"/>
               </a:spcAft>
             </a:pPr>
             <a:r>
-              <a:rPr sz="1600" b="1" i="0">
-                <a:solidFill>
-                  <a:srgbClr val="2563EB"/>
-                </a:solidFill>
-                <a:latin typeface="Calibri"/>
-              </a:rPr>
-              <a:t>•  </a:t>
-            </a:r>
-            <a:r>
-              <a:rPr sz="1600" b="1" i="0">
-                <a:solidFill>
-                  <a:srgbClr val="1D2433"/>
-                </a:solidFill>
-                <a:latin typeface="Calibri"/>
-              </a:rPr>
-              <a:t>Radii of curvature (R₁, R₂)  </a:t>
-            </a:r>
-            <a:r>
-              <a:rPr sz="1500" b="0" i="0">
+              <a:rPr sz="1350" b="0" i="0">
                 <a:solidFill>
                   <a:srgbClr val="6B7280"/>
                 </a:solidFill>
                 <a:latin typeface="Calibri"/>
               </a:rPr>
-              <a:t>The radii of those two spheres.</a:t>
-            </a:r>
-          </a:p>
+              <a:t>The centres of the two spheres whose surfaces form the two faces of the lens.</a:t>
+            </a:r>
+          </a:p>
+        </p:txBody>
+      </p:sp>
+      <p:sp>
+        <p:nvSpPr>
+          <p:cNvPr id="9" name="Rounded Rectangle 8"/>
+          <p:cNvSpPr/>
+          <p:nvPr/>
+        </p:nvSpPr>
+        <p:spPr>
+          <a:xfrm>
+            <a:off x="1051560" y="2920898"/>
+            <a:ext cx="100584" cy="363778"/>
+          </a:xfrm>
+          <a:prstGeom prst="roundRect">
+            <a:avLst>
+              <a:gd name="adj" fmla="val 50000"/>
+            </a:avLst>
+          </a:prstGeom>
+          <a:solidFill>
+            <a:srgbClr val="F4801A"/>
+          </a:solidFill>
+          <a:ln>
+            <a:noFill/>
+          </a:ln>
+          <a:effectLst/>
+        </p:spPr>
+        <p:style>
+          <a:lnRef idx="1">
+            <a:schemeClr val="accent1"/>
+          </a:lnRef>
+          <a:fillRef idx="3">
+            <a:schemeClr val="accent1"/>
+          </a:fillRef>
+          <a:effectRef idx="2">
+            <a:schemeClr val="accent1"/>
+          </a:effectRef>
+          <a:fontRef idx="minor">
+            <a:schemeClr val="lt1"/>
+          </a:fontRef>
+        </p:style>
+        <p:txBody>
+          <a:bodyPr rtlCol="0" anchor="ctr"/>
+          <a:lstStyle/>
+          <a:p>
+            <a:pPr algn="ctr"/>
+          </a:p>
+        </p:txBody>
+      </p:sp>
+      <p:sp>
+        <p:nvSpPr>
+          <p:cNvPr id="10" name="TextBox 9"/>
+          <p:cNvSpPr txBox="1"/>
+          <p:nvPr/>
+        </p:nvSpPr>
+        <p:spPr>
+          <a:xfrm>
+            <a:off x="1371600" y="2827019"/>
+            <a:ext cx="9784080" cy="586740"/>
+          </a:xfrm>
+          <a:prstGeom prst="rect">
+            <a:avLst/>
+          </a:prstGeom>
+          <a:noFill/>
+        </p:spPr>
+        <p:txBody>
+          <a:bodyPr wrap="square" anchor="ctr" lIns="0" rIns="0" tIns="0" bIns="0">
+            <a:spAutoFit/>
+          </a:bodyPr>
+          <a:lstStyle/>
           <a:p>
             <a:pPr algn="l">
               <a:lnSpc>
-                <a:spcPct val="105000"/>
+                <a:spcPct val="102000"/>
               </a:lnSpc>
               <a:spcAft>
-                <a:spcPts val="1100"/>
+                <a:spcPts val="300"/>
               </a:spcAft>
             </a:pPr>
             <a:r>
-              <a:rPr sz="1600" b="1" i="0">
-                <a:solidFill>
-                  <a:srgbClr val="2563EB"/>
-                </a:solidFill>
-                <a:latin typeface="Calibri"/>
-              </a:rPr>
-              <a:t>•  </a:t>
-            </a:r>
-            <a:r>
-              <a:rPr sz="1600" b="1" i="0">
+              <a:rPr sz="1700" b="1" i="0">
                 <a:solidFill>
                   <a:srgbClr val="1D2433"/>
                 </a:solidFill>
                 <a:latin typeface="Calibri"/>
               </a:rPr>
-              <a:t>Principal axis  </a:t>
-            </a:r>
-            <a:r>
-              <a:rPr sz="1500" b="0" i="0">
-                <a:solidFill>
-                  <a:srgbClr val="6B7280"/>
-                </a:solidFill>
-                <a:latin typeface="Calibri"/>
-              </a:rPr>
-              <a:t>The straight line passing through both centres of curvature (and the optical centre).</a:t>
+              <a:t>Radii of curvature (R₁, R₂)</a:t>
             </a:r>
           </a:p>
           <a:p>
             <a:pPr algn="l">
               <a:lnSpc>
-                <a:spcPct val="105000"/>
+                <a:spcPct val="102000"/>
               </a:lnSpc>
               <a:spcAft>
-                <a:spcPts val="1100"/>
+                <a:spcPts val="300"/>
               </a:spcAft>
             </a:pPr>
             <a:r>
-              <a:rPr sz="1600" b="1" i="0">
-                <a:solidFill>
-                  <a:srgbClr val="2563EB"/>
-                </a:solidFill>
-                <a:latin typeface="Calibri"/>
-              </a:rPr>
-              <a:t>•  </a:t>
-            </a:r>
-            <a:r>
-              <a:rPr sz="1600" b="1" i="0">
-                <a:solidFill>
-                  <a:srgbClr val="1D2433"/>
-                </a:solidFill>
-                <a:latin typeface="Calibri"/>
-              </a:rPr>
-              <a:t>Optical centre (O)  </a:t>
-            </a:r>
-            <a:r>
-              <a:rPr sz="1500" b="0" i="0">
+              <a:rPr sz="1350" b="0" i="0">
                 <a:solidFill>
                   <a:srgbClr val="6B7280"/>
                 </a:solidFill>
                 <a:latin typeface="Calibri"/>
               </a:rPr>
-              <a:t>The central point of the lens; a ray passing through it goes straight, without any deviation.</a:t>
-            </a:r>
-          </a:p>
+              <a:t>The radii of those two spheres.</a:t>
+            </a:r>
+          </a:p>
+        </p:txBody>
+      </p:sp>
+      <p:sp>
+        <p:nvSpPr>
+          <p:cNvPr id="11" name="Rounded Rectangle 10"/>
+          <p:cNvSpPr/>
+          <p:nvPr/>
+        </p:nvSpPr>
+        <p:spPr>
+          <a:xfrm>
+            <a:off x="1051560" y="3507638"/>
+            <a:ext cx="100584" cy="363778"/>
+          </a:xfrm>
+          <a:prstGeom prst="roundRect">
+            <a:avLst>
+              <a:gd name="adj" fmla="val 50000"/>
+            </a:avLst>
+          </a:prstGeom>
+          <a:solidFill>
+            <a:srgbClr val="6A4C93"/>
+          </a:solidFill>
+          <a:ln>
+            <a:noFill/>
+          </a:ln>
+          <a:effectLst/>
+        </p:spPr>
+        <p:style>
+          <a:lnRef idx="1">
+            <a:schemeClr val="accent1"/>
+          </a:lnRef>
+          <a:fillRef idx="3">
+            <a:schemeClr val="accent1"/>
+          </a:fillRef>
+          <a:effectRef idx="2">
+            <a:schemeClr val="accent1"/>
+          </a:effectRef>
+          <a:fontRef idx="minor">
+            <a:schemeClr val="lt1"/>
+          </a:fontRef>
+        </p:style>
+        <p:txBody>
+          <a:bodyPr rtlCol="0" anchor="ctr"/>
+          <a:lstStyle/>
+          <a:p>
+            <a:pPr algn="ctr"/>
+          </a:p>
+        </p:txBody>
+      </p:sp>
+      <p:sp>
+        <p:nvSpPr>
+          <p:cNvPr id="12" name="TextBox 11"/>
+          <p:cNvSpPr txBox="1"/>
+          <p:nvPr/>
+        </p:nvSpPr>
+        <p:spPr>
+          <a:xfrm>
+            <a:off x="1371600" y="3413759"/>
+            <a:ext cx="9784080" cy="586740"/>
+          </a:xfrm>
+          <a:prstGeom prst="rect">
+            <a:avLst/>
+          </a:prstGeom>
+          <a:noFill/>
+        </p:spPr>
+        <p:txBody>
+          <a:bodyPr wrap="square" anchor="ctr" lIns="0" rIns="0" tIns="0" bIns="0">
+            <a:spAutoFit/>
+          </a:bodyPr>
+          <a:lstStyle/>
           <a:p>
             <a:pPr algn="l">
               <a:lnSpc>
-                <a:spcPct val="105000"/>
+                <a:spcPct val="102000"/>
               </a:lnSpc>
               <a:spcAft>
-                <a:spcPts val="1100"/>
+                <a:spcPts val="300"/>
               </a:spcAft>
             </a:pPr>
             <a:r>
-              <a:rPr sz="1600" b="1" i="0">
-                <a:solidFill>
-                  <a:srgbClr val="2563EB"/>
-                </a:solidFill>
-                <a:latin typeface="Calibri"/>
-              </a:rPr>
-              <a:t>•  </a:t>
-            </a:r>
-            <a:r>
-              <a:rPr sz="1600" b="1" i="0">
+              <a:rPr sz="1700" b="1" i="0">
                 <a:solidFill>
                   <a:srgbClr val="1D2433"/>
                 </a:solidFill>
                 <a:latin typeface="Calibri"/>
               </a:rPr>
-              <a:t>Principal focus (F)  </a:t>
-            </a:r>
-            <a:r>
-              <a:rPr sz="1500" b="0" i="0">
-                <a:solidFill>
-                  <a:srgbClr val="6B7280"/>
-                </a:solidFill>
-                <a:latin typeface="Calibri"/>
-              </a:rPr>
-              <a:t>The point on the principal axis where rays parallel to the axis converge (convex) or appear to diverge from (concave).</a:t>
+              <a:t>Principal axis</a:t>
             </a:r>
           </a:p>
           <a:p>
             <a:pPr algn="l">
               <a:lnSpc>
-                <a:spcPct val="105000"/>
+                <a:spcPct val="102000"/>
               </a:lnSpc>
               <a:spcAft>
-                <a:spcPts val="1100"/>
+                <a:spcPts val="300"/>
               </a:spcAft>
             </a:pPr>
             <a:r>
-              <a:rPr sz="1600" b="1" i="0">
-                <a:solidFill>
-                  <a:srgbClr val="2563EB"/>
-                </a:solidFill>
-                <a:latin typeface="Calibri"/>
-              </a:rPr>
-              <a:t>•  </a:t>
-            </a:r>
-            <a:r>
-              <a:rPr sz="1600" b="1" i="0">
+              <a:rPr sz="1350" b="0" i="0">
+                <a:solidFill>
+                  <a:srgbClr val="6B7280"/>
+                </a:solidFill>
+                <a:latin typeface="Calibri"/>
+              </a:rPr>
+              <a:t>The straight line passing through both centres of curvature (and the optical centre).</a:t>
+            </a:r>
+          </a:p>
+        </p:txBody>
+      </p:sp>
+      <p:sp>
+        <p:nvSpPr>
+          <p:cNvPr id="13" name="Rounded Rectangle 12"/>
+          <p:cNvSpPr/>
+          <p:nvPr/>
+        </p:nvSpPr>
+        <p:spPr>
+          <a:xfrm>
+            <a:off x="1051560" y="4094378"/>
+            <a:ext cx="100584" cy="363778"/>
+          </a:xfrm>
+          <a:prstGeom prst="roundRect">
+            <a:avLst>
+              <a:gd name="adj" fmla="val 50000"/>
+            </a:avLst>
+          </a:prstGeom>
+          <a:solidFill>
+            <a:srgbClr val="E63946"/>
+          </a:solidFill>
+          <a:ln>
+            <a:noFill/>
+          </a:ln>
+          <a:effectLst/>
+        </p:spPr>
+        <p:style>
+          <a:lnRef idx="1">
+            <a:schemeClr val="accent1"/>
+          </a:lnRef>
+          <a:fillRef idx="3">
+            <a:schemeClr val="accent1"/>
+          </a:fillRef>
+          <a:effectRef idx="2">
+            <a:schemeClr val="accent1"/>
+          </a:effectRef>
+          <a:fontRef idx="minor">
+            <a:schemeClr val="lt1"/>
+          </a:fontRef>
+        </p:style>
+        <p:txBody>
+          <a:bodyPr rtlCol="0" anchor="ctr"/>
+          <a:lstStyle/>
+          <a:p>
+            <a:pPr algn="ctr"/>
+          </a:p>
+        </p:txBody>
+      </p:sp>
+      <p:sp>
+        <p:nvSpPr>
+          <p:cNvPr id="14" name="TextBox 13"/>
+          <p:cNvSpPr txBox="1"/>
+          <p:nvPr/>
+        </p:nvSpPr>
+        <p:spPr>
+          <a:xfrm>
+            <a:off x="1371600" y="4000500"/>
+            <a:ext cx="9784080" cy="586740"/>
+          </a:xfrm>
+          <a:prstGeom prst="rect">
+            <a:avLst/>
+          </a:prstGeom>
+          <a:noFill/>
+        </p:spPr>
+        <p:txBody>
+          <a:bodyPr wrap="square" anchor="ctr" lIns="0" rIns="0" tIns="0" bIns="0">
+            <a:spAutoFit/>
+          </a:bodyPr>
+          <a:lstStyle/>
+          <a:p>
+            <a:pPr algn="l">
+              <a:lnSpc>
+                <a:spcPct val="102000"/>
+              </a:lnSpc>
+              <a:spcAft>
+                <a:spcPts val="300"/>
+              </a:spcAft>
+            </a:pPr>
+            <a:r>
+              <a:rPr sz="1700" b="1" i="0">
                 <a:solidFill>
                   <a:srgbClr val="1D2433"/>
                 </a:solidFill>
                 <a:latin typeface="Calibri"/>
               </a:rPr>
-              <a:t>Focal length (f)  </a:t>
-            </a:r>
-            <a:r>
-              <a:rPr sz="1500" b="0" i="0">
+              <a:t>Optical centre (O)</a:t>
+            </a:r>
+          </a:p>
+          <a:p>
+            <a:pPr algn="l">
+              <a:lnSpc>
+                <a:spcPct val="102000"/>
+              </a:lnSpc>
+              <a:spcAft>
+                <a:spcPts val="300"/>
+              </a:spcAft>
+            </a:pPr>
+            <a:r>
+              <a:rPr sz="1350" b="0" i="0">
+                <a:solidFill>
+                  <a:srgbClr val="6B7280"/>
+                </a:solidFill>
+                <a:latin typeface="Calibri"/>
+              </a:rPr>
+              <a:t>The central point of the lens; a ray passing through it goes straight, without any deviation.</a:t>
+            </a:r>
+          </a:p>
+        </p:txBody>
+      </p:sp>
+      <p:sp>
+        <p:nvSpPr>
+          <p:cNvPr id="15" name="Rounded Rectangle 14"/>
+          <p:cNvSpPr/>
+          <p:nvPr/>
+        </p:nvSpPr>
+        <p:spPr>
+          <a:xfrm>
+            <a:off x="1051560" y="4681118"/>
+            <a:ext cx="100584" cy="363778"/>
+          </a:xfrm>
+          <a:prstGeom prst="roundRect">
+            <a:avLst>
+              <a:gd name="adj" fmla="val 50000"/>
+            </a:avLst>
+          </a:prstGeom>
+          <a:solidFill>
+            <a:srgbClr val="2563EB"/>
+          </a:solidFill>
+          <a:ln>
+            <a:noFill/>
+          </a:ln>
+          <a:effectLst/>
+        </p:spPr>
+        <p:style>
+          <a:lnRef idx="1">
+            <a:schemeClr val="accent1"/>
+          </a:lnRef>
+          <a:fillRef idx="3">
+            <a:schemeClr val="accent1"/>
+          </a:fillRef>
+          <a:effectRef idx="2">
+            <a:schemeClr val="accent1"/>
+          </a:effectRef>
+          <a:fontRef idx="minor">
+            <a:schemeClr val="lt1"/>
+          </a:fontRef>
+        </p:style>
+        <p:txBody>
+          <a:bodyPr rtlCol="0" anchor="ctr"/>
+          <a:lstStyle/>
+          <a:p>
+            <a:pPr algn="ctr"/>
+          </a:p>
+        </p:txBody>
+      </p:sp>
+      <p:sp>
+        <p:nvSpPr>
+          <p:cNvPr id="16" name="TextBox 15"/>
+          <p:cNvSpPr txBox="1"/>
+          <p:nvPr/>
+        </p:nvSpPr>
+        <p:spPr>
+          <a:xfrm>
+            <a:off x="1371600" y="4587239"/>
+            <a:ext cx="9784080" cy="586740"/>
+          </a:xfrm>
+          <a:prstGeom prst="rect">
+            <a:avLst/>
+          </a:prstGeom>
+          <a:noFill/>
+        </p:spPr>
+        <p:txBody>
+          <a:bodyPr wrap="square" anchor="ctr" lIns="0" rIns="0" tIns="0" bIns="0">
+            <a:spAutoFit/>
+          </a:bodyPr>
+          <a:lstStyle/>
+          <a:p>
+            <a:pPr algn="l">
+              <a:lnSpc>
+                <a:spcPct val="102000"/>
+              </a:lnSpc>
+              <a:spcAft>
+                <a:spcPts val="300"/>
+              </a:spcAft>
+            </a:pPr>
+            <a:r>
+              <a:rPr sz="1700" b="1" i="0">
+                <a:solidFill>
+                  <a:srgbClr val="1D2433"/>
+                </a:solidFill>
+                <a:latin typeface="Calibri"/>
+              </a:rPr>
+              <a:t>Principal focus (F)</a:t>
+            </a:r>
+          </a:p>
+          <a:p>
+            <a:pPr algn="l">
+              <a:lnSpc>
+                <a:spcPct val="102000"/>
+              </a:lnSpc>
+              <a:spcAft>
+                <a:spcPts val="300"/>
+              </a:spcAft>
+            </a:pPr>
+            <a:r>
+              <a:rPr sz="1350" b="0" i="0">
+                <a:solidFill>
+                  <a:srgbClr val="6B7280"/>
+                </a:solidFill>
+                <a:latin typeface="Calibri"/>
+              </a:rPr>
+              <a:t>The point on the principal axis where rays parallel to the axis converge (convex) or appear to diverge from (concave).</a:t>
+            </a:r>
+          </a:p>
+        </p:txBody>
+      </p:sp>
+      <p:sp>
+        <p:nvSpPr>
+          <p:cNvPr id="17" name="Rounded Rectangle 16"/>
+          <p:cNvSpPr/>
+          <p:nvPr/>
+        </p:nvSpPr>
+        <p:spPr>
+          <a:xfrm>
+            <a:off x="1051560" y="5267858"/>
+            <a:ext cx="100584" cy="363778"/>
+          </a:xfrm>
+          <a:prstGeom prst="roundRect">
+            <a:avLst>
+              <a:gd name="adj" fmla="val 50000"/>
+            </a:avLst>
+          </a:prstGeom>
+          <a:solidFill>
+            <a:srgbClr val="2A9D8F"/>
+          </a:solidFill>
+          <a:ln>
+            <a:noFill/>
+          </a:ln>
+          <a:effectLst/>
+        </p:spPr>
+        <p:style>
+          <a:lnRef idx="1">
+            <a:schemeClr val="accent1"/>
+          </a:lnRef>
+          <a:fillRef idx="3">
+            <a:schemeClr val="accent1"/>
+          </a:fillRef>
+          <a:effectRef idx="2">
+            <a:schemeClr val="accent1"/>
+          </a:effectRef>
+          <a:fontRef idx="minor">
+            <a:schemeClr val="lt1"/>
+          </a:fontRef>
+        </p:style>
+        <p:txBody>
+          <a:bodyPr rtlCol="0" anchor="ctr"/>
+          <a:lstStyle/>
+          <a:p>
+            <a:pPr algn="ctr"/>
+          </a:p>
+        </p:txBody>
+      </p:sp>
+      <p:sp>
+        <p:nvSpPr>
+          <p:cNvPr id="18" name="TextBox 17"/>
+          <p:cNvSpPr txBox="1"/>
+          <p:nvPr/>
+        </p:nvSpPr>
+        <p:spPr>
+          <a:xfrm>
+            <a:off x="1371600" y="5173980"/>
+            <a:ext cx="9784080" cy="586740"/>
+          </a:xfrm>
+          <a:prstGeom prst="rect">
+            <a:avLst/>
+          </a:prstGeom>
+          <a:noFill/>
+        </p:spPr>
+        <p:txBody>
+          <a:bodyPr wrap="square" anchor="ctr" lIns="0" rIns="0" tIns="0" bIns="0">
+            <a:spAutoFit/>
+          </a:bodyPr>
+          <a:lstStyle/>
+          <a:p>
+            <a:pPr algn="l">
+              <a:lnSpc>
+                <a:spcPct val="102000"/>
+              </a:lnSpc>
+              <a:spcAft>
+                <a:spcPts val="300"/>
+              </a:spcAft>
+            </a:pPr>
+            <a:r>
+              <a:rPr sz="1700" b="1" i="0">
+                <a:solidFill>
+                  <a:srgbClr val="1D2433"/>
+                </a:solidFill>
+                <a:latin typeface="Calibri"/>
+              </a:rPr>
+              <a:t>Focal length (f)</a:t>
+            </a:r>
+          </a:p>
+          <a:p>
+            <a:pPr algn="l">
+              <a:lnSpc>
+                <a:spcPct val="102000"/>
+              </a:lnSpc>
+              <a:spcAft>
+                <a:spcPts val="300"/>
+              </a:spcAft>
+            </a:pPr>
+            <a:r>
+              <a:rPr sz="1350" b="0" i="0">
                 <a:solidFill>
                   <a:srgbClr val="6B7280"/>
                 </a:solidFill>
@@ -27069,7 +27723,7 @@
         </p:nvSpPr>
         <p:spPr>
           <a:xfrm>
-            <a:off x="640080" y="1828800"/>
+            <a:off x="640080" y="1874519"/>
             <a:ext cx="10881360" cy="4114800"/>
           </a:xfrm>
           <a:prstGeom prst="roundRect">
@@ -27115,165 +27769,422 @@
       </p:sp>
       <p:sp>
         <p:nvSpPr>
-          <p:cNvPr id="7" name="TextBox 6"/>
+          <p:cNvPr id="7" name="Rounded Rectangle 6"/>
+          <p:cNvSpPr/>
+          <p:nvPr/>
+        </p:nvSpPr>
+        <p:spPr>
+          <a:xfrm>
+            <a:off x="1051560" y="2381097"/>
+            <a:ext cx="100584" cy="545668"/>
+          </a:xfrm>
+          <a:prstGeom prst="roundRect">
+            <a:avLst>
+              <a:gd name="adj" fmla="val 50000"/>
+            </a:avLst>
+          </a:prstGeom>
+          <a:solidFill>
+            <a:srgbClr val="0A9396"/>
+          </a:solidFill>
+          <a:ln>
+            <a:noFill/>
+          </a:ln>
+          <a:effectLst/>
+        </p:spPr>
+        <p:style>
+          <a:lnRef idx="1">
+            <a:schemeClr val="accent1"/>
+          </a:lnRef>
+          <a:fillRef idx="3">
+            <a:schemeClr val="accent1"/>
+          </a:fillRef>
+          <a:effectRef idx="2">
+            <a:schemeClr val="accent1"/>
+          </a:effectRef>
+          <a:fontRef idx="minor">
+            <a:schemeClr val="lt1"/>
+          </a:fontRef>
+        </p:style>
+        <p:txBody>
+          <a:bodyPr rtlCol="0" anchor="ctr"/>
+          <a:lstStyle/>
+          <a:p>
+            <a:pPr algn="ctr"/>
+          </a:p>
+        </p:txBody>
+      </p:sp>
+      <p:sp>
+        <p:nvSpPr>
+          <p:cNvPr id="8" name="TextBox 7"/>
           <p:cNvSpPr txBox="1"/>
           <p:nvPr/>
         </p:nvSpPr>
         <p:spPr>
           <a:xfrm>
-            <a:off x="1005840" y="2103120"/>
-            <a:ext cx="10058400" cy="3657600"/>
-          </a:xfrm>
-          <a:prstGeom prst="rect">
-            <a:avLst/>
-          </a:prstGeom>
-          <a:noFill/>
-        </p:spPr>
-        <p:txBody>
-          <a:bodyPr wrap="square" anchor="t" lIns="0" rIns="0" tIns="0" bIns="0">
+            <a:off x="1371600" y="2240279"/>
+            <a:ext cx="9784080" cy="880109"/>
+          </a:xfrm>
+          <a:prstGeom prst="rect">
+            <a:avLst/>
+          </a:prstGeom>
+          <a:noFill/>
+        </p:spPr>
+        <p:txBody>
+          <a:bodyPr wrap="square" anchor="ctr" lIns="0" rIns="0" tIns="0" bIns="0">
             <a:spAutoFit/>
           </a:bodyPr>
           <a:lstStyle/>
           <a:p>
             <a:pPr algn="l">
               <a:lnSpc>
-                <a:spcPct val="105000"/>
+                <a:spcPct val="102000"/>
               </a:lnSpc>
               <a:spcAft>
-                <a:spcPts val="1100"/>
+                <a:spcPts val="300"/>
               </a:spcAft>
             </a:pPr>
             <a:r>
-              <a:rPr sz="1600" b="1" i="0">
-                <a:solidFill>
-                  <a:srgbClr val="2563EB"/>
-                </a:solidFill>
-                <a:latin typeface="Calibri"/>
-              </a:rPr>
-              <a:t>•  </a:t>
-            </a:r>
-            <a:r>
-              <a:rPr sz="1600" b="1" i="0">
+              <a:rPr sz="1700" b="1" i="0">
                 <a:solidFill>
                   <a:srgbClr val="1D2433"/>
                 </a:solidFill>
                 <a:latin typeface="Calibri"/>
               </a:rPr>
-              <a:t>Ray parallel to the principal axis  </a:t>
-            </a:r>
-            <a:r>
-              <a:rPr sz="1500" b="0" i="0">
-                <a:solidFill>
-                  <a:srgbClr val="6B7280"/>
-                </a:solidFill>
-                <a:latin typeface="Calibri"/>
-              </a:rPr>
-              <a:t>After refraction it passes through the principal focus F (convex) or appears to come from F (concave).</a:t>
+              <a:t>Ray parallel to the principal axis</a:t>
             </a:r>
           </a:p>
           <a:p>
             <a:pPr algn="l">
               <a:lnSpc>
-                <a:spcPct val="105000"/>
+                <a:spcPct val="102000"/>
               </a:lnSpc>
               <a:spcAft>
-                <a:spcPts val="1100"/>
+                <a:spcPts val="300"/>
               </a:spcAft>
             </a:pPr>
             <a:r>
-              <a:rPr sz="1600" b="1" i="0">
-                <a:solidFill>
-                  <a:srgbClr val="2563EB"/>
-                </a:solidFill>
-                <a:latin typeface="Calibri"/>
-              </a:rPr>
-              <a:t>•  </a:t>
-            </a:r>
-            <a:r>
-              <a:rPr sz="1600" b="1" i="0">
-                <a:solidFill>
-                  <a:srgbClr val="1D2433"/>
-                </a:solidFill>
-                <a:latin typeface="Calibri"/>
-              </a:rPr>
-              <a:t>Ray through the optical centre  </a:t>
-            </a:r>
-            <a:r>
-              <a:rPr sz="1500" b="0" i="0">
+              <a:rPr sz="1350" b="0" i="0">
                 <a:solidFill>
                   <a:srgbClr val="6B7280"/>
                 </a:solidFill>
                 <a:latin typeface="Calibri"/>
               </a:rPr>
-              <a:t>Passes straight through without any deviation.</a:t>
-            </a:r>
-          </a:p>
+              <a:t>After refraction it passes through the principal focus F (convex) or appears to come from F (concave).</a:t>
+            </a:r>
+          </a:p>
+        </p:txBody>
+      </p:sp>
+      <p:sp>
+        <p:nvSpPr>
+          <p:cNvPr id="9" name="Rounded Rectangle 8"/>
+          <p:cNvSpPr/>
+          <p:nvPr/>
+        </p:nvSpPr>
+        <p:spPr>
+          <a:xfrm>
+            <a:off x="1051560" y="3261207"/>
+            <a:ext cx="100584" cy="545668"/>
+          </a:xfrm>
+          <a:prstGeom prst="roundRect">
+            <a:avLst>
+              <a:gd name="adj" fmla="val 50000"/>
+            </a:avLst>
+          </a:prstGeom>
+          <a:solidFill>
+            <a:srgbClr val="F4801A"/>
+          </a:solidFill>
+          <a:ln>
+            <a:noFill/>
+          </a:ln>
+          <a:effectLst/>
+        </p:spPr>
+        <p:style>
+          <a:lnRef idx="1">
+            <a:schemeClr val="accent1"/>
+          </a:lnRef>
+          <a:fillRef idx="3">
+            <a:schemeClr val="accent1"/>
+          </a:fillRef>
+          <a:effectRef idx="2">
+            <a:schemeClr val="accent1"/>
+          </a:effectRef>
+          <a:fontRef idx="minor">
+            <a:schemeClr val="lt1"/>
+          </a:fontRef>
+        </p:style>
+        <p:txBody>
+          <a:bodyPr rtlCol="0" anchor="ctr"/>
+          <a:lstStyle/>
+          <a:p>
+            <a:pPr algn="ctr"/>
+          </a:p>
+        </p:txBody>
+      </p:sp>
+      <p:sp>
+        <p:nvSpPr>
+          <p:cNvPr id="10" name="TextBox 9"/>
+          <p:cNvSpPr txBox="1"/>
+          <p:nvPr/>
+        </p:nvSpPr>
+        <p:spPr>
+          <a:xfrm>
+            <a:off x="1371600" y="3120389"/>
+            <a:ext cx="9784080" cy="880109"/>
+          </a:xfrm>
+          <a:prstGeom prst="rect">
+            <a:avLst/>
+          </a:prstGeom>
+          <a:noFill/>
+        </p:spPr>
+        <p:txBody>
+          <a:bodyPr wrap="square" anchor="ctr" lIns="0" rIns="0" tIns="0" bIns="0">
+            <a:spAutoFit/>
+          </a:bodyPr>
+          <a:lstStyle/>
           <a:p>
             <a:pPr algn="l">
               <a:lnSpc>
-                <a:spcPct val="105000"/>
+                <a:spcPct val="102000"/>
               </a:lnSpc>
               <a:spcAft>
-                <a:spcPts val="1100"/>
+                <a:spcPts val="300"/>
               </a:spcAft>
             </a:pPr>
             <a:r>
-              <a:rPr sz="1600" b="1" i="0">
-                <a:solidFill>
-                  <a:srgbClr val="2563EB"/>
-                </a:solidFill>
-                <a:latin typeface="Calibri"/>
-              </a:rPr>
-              <a:t>•  </a:t>
-            </a:r>
-            <a:r>
-              <a:rPr sz="1600" b="1" i="0">
+              <a:rPr sz="1700" b="1" i="0">
                 <a:solidFill>
                   <a:srgbClr val="1D2433"/>
                 </a:solidFill>
                 <a:latin typeface="Calibri"/>
               </a:rPr>
-              <a:t>Ray through the principal focus  </a:t>
-            </a:r>
-            <a:r>
-              <a:rPr sz="1500" b="0" i="0">
-                <a:solidFill>
-                  <a:srgbClr val="6B7280"/>
-                </a:solidFill>
-                <a:latin typeface="Calibri"/>
-              </a:rPr>
-              <a:t>A ray passing through F (convex) emerges parallel to the principal axis after refraction.</a:t>
+              <a:t>Ray through the optical centre</a:t>
             </a:r>
           </a:p>
           <a:p>
             <a:pPr algn="l">
               <a:lnSpc>
-                <a:spcPct val="105000"/>
+                <a:spcPct val="102000"/>
               </a:lnSpc>
               <a:spcAft>
-                <a:spcPts val="1100"/>
+                <a:spcPts val="300"/>
               </a:spcAft>
             </a:pPr>
             <a:r>
-              <a:rPr sz="1600" b="1" i="0">
-                <a:solidFill>
-                  <a:srgbClr val="2563EB"/>
-                </a:solidFill>
-                <a:latin typeface="Calibri"/>
-              </a:rPr>
-              <a:t>•  </a:t>
-            </a:r>
-            <a:r>
-              <a:rPr sz="1600" b="1" i="0">
+              <a:rPr sz="1350" b="0" i="0">
+                <a:solidFill>
+                  <a:srgbClr val="6B7280"/>
+                </a:solidFill>
+                <a:latin typeface="Calibri"/>
+              </a:rPr>
+              <a:t>Passes straight through without any deviation.</a:t>
+            </a:r>
+          </a:p>
+        </p:txBody>
+      </p:sp>
+      <p:sp>
+        <p:nvSpPr>
+          <p:cNvPr id="11" name="Rounded Rectangle 10"/>
+          <p:cNvSpPr/>
+          <p:nvPr/>
+        </p:nvSpPr>
+        <p:spPr>
+          <a:xfrm>
+            <a:off x="1051560" y="4141317"/>
+            <a:ext cx="100584" cy="545668"/>
+          </a:xfrm>
+          <a:prstGeom prst="roundRect">
+            <a:avLst>
+              <a:gd name="adj" fmla="val 50000"/>
+            </a:avLst>
+          </a:prstGeom>
+          <a:solidFill>
+            <a:srgbClr val="6A4C93"/>
+          </a:solidFill>
+          <a:ln>
+            <a:noFill/>
+          </a:ln>
+          <a:effectLst/>
+        </p:spPr>
+        <p:style>
+          <a:lnRef idx="1">
+            <a:schemeClr val="accent1"/>
+          </a:lnRef>
+          <a:fillRef idx="3">
+            <a:schemeClr val="accent1"/>
+          </a:fillRef>
+          <a:effectRef idx="2">
+            <a:schemeClr val="accent1"/>
+          </a:effectRef>
+          <a:fontRef idx="minor">
+            <a:schemeClr val="lt1"/>
+          </a:fontRef>
+        </p:style>
+        <p:txBody>
+          <a:bodyPr rtlCol="0" anchor="ctr"/>
+          <a:lstStyle/>
+          <a:p>
+            <a:pPr algn="ctr"/>
+          </a:p>
+        </p:txBody>
+      </p:sp>
+      <p:sp>
+        <p:nvSpPr>
+          <p:cNvPr id="12" name="TextBox 11"/>
+          <p:cNvSpPr txBox="1"/>
+          <p:nvPr/>
+        </p:nvSpPr>
+        <p:spPr>
+          <a:xfrm>
+            <a:off x="1371600" y="4000500"/>
+            <a:ext cx="9784080" cy="880109"/>
+          </a:xfrm>
+          <a:prstGeom prst="rect">
+            <a:avLst/>
+          </a:prstGeom>
+          <a:noFill/>
+        </p:spPr>
+        <p:txBody>
+          <a:bodyPr wrap="square" anchor="ctr" lIns="0" rIns="0" tIns="0" bIns="0">
+            <a:spAutoFit/>
+          </a:bodyPr>
+          <a:lstStyle/>
+          <a:p>
+            <a:pPr algn="l">
+              <a:lnSpc>
+                <a:spcPct val="102000"/>
+              </a:lnSpc>
+              <a:spcAft>
+                <a:spcPts val="300"/>
+              </a:spcAft>
+            </a:pPr>
+            <a:r>
+              <a:rPr sz="1700" b="1" i="0">
                 <a:solidFill>
                   <a:srgbClr val="1D2433"/>
                 </a:solidFill>
                 <a:latin typeface="Calibri"/>
               </a:rPr>
-              <a:t>Locating the image  </a:t>
-            </a:r>
-            <a:r>
-              <a:rPr sz="1500" b="0" i="0">
+              <a:t>Ray through the principal focus</a:t>
+            </a:r>
+          </a:p>
+          <a:p>
+            <a:pPr algn="l">
+              <a:lnSpc>
+                <a:spcPct val="102000"/>
+              </a:lnSpc>
+              <a:spcAft>
+                <a:spcPts val="300"/>
+              </a:spcAft>
+            </a:pPr>
+            <a:r>
+              <a:rPr sz="1350" b="0" i="0">
+                <a:solidFill>
+                  <a:srgbClr val="6B7280"/>
+                </a:solidFill>
+                <a:latin typeface="Calibri"/>
+              </a:rPr>
+              <a:t>A ray passing through F (convex) emerges parallel to the principal axis after refraction.</a:t>
+            </a:r>
+          </a:p>
+        </p:txBody>
+      </p:sp>
+      <p:sp>
+        <p:nvSpPr>
+          <p:cNvPr id="13" name="Rounded Rectangle 12"/>
+          <p:cNvSpPr/>
+          <p:nvPr/>
+        </p:nvSpPr>
+        <p:spPr>
+          <a:xfrm>
+            <a:off x="1051560" y="5021427"/>
+            <a:ext cx="100584" cy="545668"/>
+          </a:xfrm>
+          <a:prstGeom prst="roundRect">
+            <a:avLst>
+              <a:gd name="adj" fmla="val 50000"/>
+            </a:avLst>
+          </a:prstGeom>
+          <a:solidFill>
+            <a:srgbClr val="E63946"/>
+          </a:solidFill>
+          <a:ln>
+            <a:noFill/>
+          </a:ln>
+          <a:effectLst/>
+        </p:spPr>
+        <p:style>
+          <a:lnRef idx="1">
+            <a:schemeClr val="accent1"/>
+          </a:lnRef>
+          <a:fillRef idx="3">
+            <a:schemeClr val="accent1"/>
+          </a:fillRef>
+          <a:effectRef idx="2">
+            <a:schemeClr val="accent1"/>
+          </a:effectRef>
+          <a:fontRef idx="minor">
+            <a:schemeClr val="lt1"/>
+          </a:fontRef>
+        </p:style>
+        <p:txBody>
+          <a:bodyPr rtlCol="0" anchor="ctr"/>
+          <a:lstStyle/>
+          <a:p>
+            <a:pPr algn="ctr"/>
+          </a:p>
+        </p:txBody>
+      </p:sp>
+      <p:sp>
+        <p:nvSpPr>
+          <p:cNvPr id="14" name="TextBox 13"/>
+          <p:cNvSpPr txBox="1"/>
+          <p:nvPr/>
+        </p:nvSpPr>
+        <p:spPr>
+          <a:xfrm>
+            <a:off x="1371600" y="4880609"/>
+            <a:ext cx="9784080" cy="880109"/>
+          </a:xfrm>
+          <a:prstGeom prst="rect">
+            <a:avLst/>
+          </a:prstGeom>
+          <a:noFill/>
+        </p:spPr>
+        <p:txBody>
+          <a:bodyPr wrap="square" anchor="ctr" lIns="0" rIns="0" tIns="0" bIns="0">
+            <a:spAutoFit/>
+          </a:bodyPr>
+          <a:lstStyle/>
+          <a:p>
+            <a:pPr algn="l">
+              <a:lnSpc>
+                <a:spcPct val="102000"/>
+              </a:lnSpc>
+              <a:spcAft>
+                <a:spcPts val="300"/>
+              </a:spcAft>
+            </a:pPr>
+            <a:r>
+              <a:rPr sz="1700" b="1" i="0">
+                <a:solidFill>
+                  <a:srgbClr val="1D2433"/>
+                </a:solidFill>
+                <a:latin typeface="Calibri"/>
+              </a:rPr>
+              <a:t>Locating the image</a:t>
+            </a:r>
+          </a:p>
+          <a:p>
+            <a:pPr algn="l">
+              <a:lnSpc>
+                <a:spcPct val="102000"/>
+              </a:lnSpc>
+              <a:spcAft>
+                <a:spcPts val="300"/>
+              </a:spcAft>
+            </a:pPr>
+            <a:r>
+              <a:rPr sz="1350" b="0" i="0">
                 <a:solidFill>
                   <a:srgbClr val="6B7280"/>
                 </a:solidFill>
@@ -27552,8 +28463,8 @@
         </p:nvSpPr>
         <p:spPr>
           <a:xfrm>
-            <a:off x="1143000" y="2057400"/>
-            <a:ext cx="5029200" cy="411480"/>
+            <a:off x="1188720" y="2103120"/>
+            <a:ext cx="5029200" cy="457200"/>
           </a:xfrm>
           <a:prstGeom prst="rect">
             <a:avLst/>
@@ -27587,8 +28498,8 @@
         </p:nvSpPr>
         <p:spPr>
           <a:xfrm>
-            <a:off x="1143000" y="2606040"/>
-            <a:ext cx="5074920" cy="3063240"/>
+            <a:off x="1188720" y="2697480"/>
+            <a:ext cx="5029200" cy="3108959"/>
           </a:xfrm>
           <a:prstGeom prst="rect">
             <a:avLst/>
@@ -27603,14 +28514,14 @@
           <a:p>
             <a:pPr algn="l">
               <a:lnSpc>
-                <a:spcPct val="105000"/>
+                <a:spcPct val="106000"/>
               </a:lnSpc>
               <a:spcAft>
                 <a:spcPts val="900"/>
               </a:spcAft>
             </a:pPr>
             <a:r>
-              <a:rPr sz="1500" b="1" i="0">
+              <a:rPr sz="1300" b="1" i="0">
                 <a:solidFill>
                   <a:srgbClr val="2563EB"/>
                 </a:solidFill>
@@ -27619,7 +28530,7 @@
               <a:t>•  </a:t>
             </a:r>
             <a:r>
-              <a:rPr sz="1500" b="0" i="0">
+              <a:rPr sz="1300" b="0" i="0">
                 <a:solidFill>
                   <a:srgbClr val="1D2433"/>
                 </a:solidFill>
@@ -27631,14 +28542,14 @@
           <a:p>
             <a:pPr algn="l">
               <a:lnSpc>
-                <a:spcPct val="105000"/>
+                <a:spcPct val="106000"/>
               </a:lnSpc>
               <a:spcAft>
                 <a:spcPts val="900"/>
               </a:spcAft>
             </a:pPr>
             <a:r>
-              <a:rPr sz="1500" b="1" i="0">
+              <a:rPr sz="1300" b="1" i="0">
                 <a:solidFill>
                   <a:srgbClr val="2563EB"/>
                 </a:solidFill>
@@ -27647,7 +28558,7 @@
               <a:t>•  </a:t>
             </a:r>
             <a:r>
-              <a:rPr sz="1500" b="0" i="0">
+              <a:rPr sz="1300" b="0" i="0">
                 <a:solidFill>
                   <a:srgbClr val="1D2433"/>
                 </a:solidFill>
@@ -27659,14 +28570,14 @@
           <a:p>
             <a:pPr algn="l">
               <a:lnSpc>
-                <a:spcPct val="105000"/>
+                <a:spcPct val="106000"/>
               </a:lnSpc>
               <a:spcAft>
                 <a:spcPts val="900"/>
               </a:spcAft>
             </a:pPr>
             <a:r>
-              <a:rPr sz="1500" b="1" i="0">
+              <a:rPr sz="1300" b="1" i="0">
                 <a:solidFill>
                   <a:srgbClr val="2563EB"/>
                 </a:solidFill>
@@ -27675,7 +28586,7 @@
               <a:t>•  </a:t>
             </a:r>
             <a:r>
-              <a:rPr sz="1500" b="0" i="0">
+              <a:rPr sz="1300" b="0" i="0">
                 <a:solidFill>
                   <a:srgbClr val="1D2433"/>
                 </a:solidFill>
@@ -27687,14 +28598,14 @@
           <a:p>
             <a:pPr algn="l">
               <a:lnSpc>
-                <a:spcPct val="105000"/>
+                <a:spcPct val="106000"/>
               </a:lnSpc>
               <a:spcAft>
                 <a:spcPts val="900"/>
               </a:spcAft>
             </a:pPr>
             <a:r>
-              <a:rPr sz="1500" b="1" i="0">
+              <a:rPr sz="1300" b="1" i="0">
                 <a:solidFill>
                   <a:srgbClr val="2563EB"/>
                 </a:solidFill>
@@ -27703,7 +28614,7 @@
               <a:t>•  </a:t>
             </a:r>
             <a:r>
-              <a:rPr sz="1500" b="0" i="0">
+              <a:rPr sz="1300" b="0" i="0">
                 <a:solidFill>
                   <a:srgbClr val="1D2433"/>
                 </a:solidFill>
@@ -27982,8 +28893,8 @@
         </p:nvSpPr>
         <p:spPr>
           <a:xfrm>
-            <a:off x="6019495" y="2057400"/>
-            <a:ext cx="5029200" cy="411480"/>
+            <a:off x="6065215" y="2103120"/>
+            <a:ext cx="5029200" cy="457200"/>
           </a:xfrm>
           <a:prstGeom prst="rect">
             <a:avLst/>
@@ -28017,8 +28928,8 @@
         </p:nvSpPr>
         <p:spPr>
           <a:xfrm>
-            <a:off x="6019495" y="2606040"/>
-            <a:ext cx="5074920" cy="3063240"/>
+            <a:off x="6065215" y="2697480"/>
+            <a:ext cx="5029200" cy="3108959"/>
           </a:xfrm>
           <a:prstGeom prst="rect">
             <a:avLst/>
@@ -28033,14 +28944,14 @@
           <a:p>
             <a:pPr algn="l">
               <a:lnSpc>
-                <a:spcPct val="105000"/>
+                <a:spcPct val="106000"/>
               </a:lnSpc>
               <a:spcAft>
                 <a:spcPts val="900"/>
               </a:spcAft>
             </a:pPr>
             <a:r>
-              <a:rPr sz="1500" b="1" i="0">
+              <a:rPr sz="1300" b="1" i="0">
                 <a:solidFill>
                   <a:srgbClr val="2563EB"/>
                 </a:solidFill>
@@ -28049,7 +28960,7 @@
               <a:t>•  </a:t>
             </a:r>
             <a:r>
-              <a:rPr sz="1500" b="0" i="0">
+              <a:rPr sz="1300" b="0" i="0">
                 <a:solidFill>
                   <a:srgbClr val="1D2433"/>
                 </a:solidFill>
@@ -28061,14 +28972,14 @@
           <a:p>
             <a:pPr algn="l">
               <a:lnSpc>
-                <a:spcPct val="105000"/>
+                <a:spcPct val="106000"/>
               </a:lnSpc>
               <a:spcAft>
                 <a:spcPts val="900"/>
               </a:spcAft>
             </a:pPr>
             <a:r>
-              <a:rPr sz="1500" b="1" i="0">
+              <a:rPr sz="1300" b="1" i="0">
                 <a:solidFill>
                   <a:srgbClr val="2563EB"/>
                 </a:solidFill>
@@ -28077,7 +28988,7 @@
               <a:t>•  </a:t>
             </a:r>
             <a:r>
-              <a:rPr sz="1500" b="0" i="0">
+              <a:rPr sz="1300" b="0" i="0">
                 <a:solidFill>
                   <a:srgbClr val="1D2433"/>
                 </a:solidFill>
@@ -28089,14 +29000,14 @@
           <a:p>
             <a:pPr algn="l">
               <a:lnSpc>
-                <a:spcPct val="105000"/>
+                <a:spcPct val="106000"/>
               </a:lnSpc>
               <a:spcAft>
                 <a:spcPts val="900"/>
               </a:spcAft>
             </a:pPr>
             <a:r>
-              <a:rPr sz="1500" b="1" i="0">
+              <a:rPr sz="1300" b="1" i="0">
                 <a:solidFill>
                   <a:srgbClr val="2563EB"/>
                 </a:solidFill>
@@ -28105,7 +29016,7 @@
               <a:t>•  </a:t>
             </a:r>
             <a:r>
-              <a:rPr sz="1500" b="0" i="0">
+              <a:rPr sz="1300" b="0" i="0">
                 <a:solidFill>
                   <a:srgbClr val="1D2433"/>
                 </a:solidFill>
@@ -28117,14 +29028,14 @@
           <a:p>
             <a:pPr algn="l">
               <a:lnSpc>
-                <a:spcPct val="105000"/>
+                <a:spcPct val="106000"/>
               </a:lnSpc>
               <a:spcAft>
                 <a:spcPts val="900"/>
               </a:spcAft>
             </a:pPr>
             <a:r>
-              <a:rPr sz="1500" b="1" i="0">
+              <a:rPr sz="1300" b="1" i="0">
                 <a:solidFill>
                   <a:srgbClr val="2563EB"/>
                 </a:solidFill>
@@ -28133,7 +29044,7 @@
               <a:t>•  </a:t>
             </a:r>
             <a:r>
-              <a:rPr sz="1500" b="0" i="0">
+              <a:rPr sz="1300" b="0" i="0">
                 <a:solidFill>
                   <a:srgbClr val="1D2433"/>
                 </a:solidFill>
